--- a/hicre_方針資料_リデザイン.pptx
+++ b/hicre_方針資料_リデザイン.pptx
@@ -10106,7 +10106,7 @@
                 <a:ea typeface="Arial"/>
                 <a:cs typeface="Arial"/>
               </a:rPr>
-              <a:t>契約期間：6ヶ月</a:t>
+              <a:t>契約期間：6ヶ月（自動更新）</a:t>
             </a:r>
           </a:p>
         </p:txBody>
@@ -10150,7 +10150,7 @@
                 <a:ea typeface="Arial"/>
                 <a:cs typeface="Arial"/>
               </a:rPr>
-              <a:t>半年ごとに条件を見直し、合意のうえ再契約。固定ではなく、状況に合わせて</a:t>
+              <a:t>6ヶ月ごとに条件を見直し、申し出がなければ同一条件で自動更新。やめる場</a:t>
             </a:r>
           </a:p>
         </p:txBody>
@@ -10194,7 +10194,7 @@
                 <a:ea typeface="Arial"/>
                 <a:cs typeface="Arial"/>
               </a:rPr>
-              <a:t>柔軟に。</a:t>
+              <a:t>合は満了の1ヶ月前までにご連絡を。</a:t>
             </a:r>
           </a:p>
         </p:txBody>
@@ -10207,7 +10207,7 @@
         </p:nvSpPr>
         <p:spPr>
           <a:xfrm>
-            <a:off x="548640" y="2606040"/>
+            <a:off x="548640" y="2697480"/>
             <a:ext cx="329184" cy="329184"/>
           </a:xfrm>
           <a:prstGeom prst="rect">
@@ -10251,7 +10251,7 @@
         </p:nvSpPr>
         <p:spPr>
           <a:xfrm>
-            <a:off x="548640" y="2606040"/>
+            <a:off x="548640" y="2697480"/>
             <a:ext cx="329184" cy="914400"/>
           </a:xfrm>
           <a:prstGeom prst="rect">
@@ -10295,7 +10295,7 @@
         </p:nvSpPr>
         <p:spPr>
           <a:xfrm>
-            <a:off x="1005840" y="2578608"/>
+            <a:off x="1005840" y="2670048"/>
             <a:ext cx="4114800" cy="914400"/>
           </a:xfrm>
           <a:prstGeom prst="rect">
@@ -10339,7 +10339,7 @@
         </p:nvSpPr>
         <p:spPr>
           <a:xfrm>
-            <a:off x="1005840" y="2889504"/>
+            <a:off x="1005840" y="2980944"/>
             <a:ext cx="4114800" cy="914400"/>
           </a:xfrm>
           <a:prstGeom prst="rect">
@@ -10383,7 +10383,7 @@
         </p:nvSpPr>
         <p:spPr>
           <a:xfrm>
-            <a:off x="548640" y="3703320"/>
+            <a:off x="548640" y="3749039"/>
             <a:ext cx="329184" cy="329184"/>
           </a:xfrm>
           <a:prstGeom prst="rect">
@@ -10427,7 +10427,7 @@
         </p:nvSpPr>
         <p:spPr>
           <a:xfrm>
-            <a:off x="548640" y="3703320"/>
+            <a:off x="548640" y="3749039"/>
             <a:ext cx="329184" cy="914400"/>
           </a:xfrm>
           <a:prstGeom prst="rect">
@@ -10471,7 +10471,7 @@
         </p:nvSpPr>
         <p:spPr>
           <a:xfrm>
-            <a:off x="1005840" y="3675887"/>
+            <a:off x="1005840" y="3721607"/>
             <a:ext cx="4114800" cy="914400"/>
           </a:xfrm>
           <a:prstGeom prst="rect">
@@ -10515,7 +10515,7 @@
         </p:nvSpPr>
         <p:spPr>
           <a:xfrm>
-            <a:off x="1005840" y="3986783"/>
+            <a:off x="1005840" y="4032503"/>
             <a:ext cx="4114800" cy="914400"/>
           </a:xfrm>
           <a:prstGeom prst="rect">
@@ -10560,7 +10560,7 @@
         <p:spPr>
           <a:xfrm>
             <a:off x="5394960" y="1463040"/>
-            <a:ext cx="3200400" cy="2240280"/>
+            <a:ext cx="3200400" cy="2395728"/>
           </a:xfrm>
           <a:prstGeom prst="rect">
             <a:avLst/>
@@ -10647,7 +10647,7 @@
         </p:nvSpPr>
         <p:spPr>
           <a:xfrm>
-            <a:off x="5532120" y="1920240"/>
+            <a:off x="5532120" y="1865376"/>
             <a:ext cx="3017520" cy="914400"/>
           </a:xfrm>
           <a:prstGeom prst="rect">
@@ -10666,7 +10666,7 @@
                 <a:spcPts val="0"/>
               </a:spcBef>
               <a:spcAft>
-                <a:spcPts val="200"/>
+                <a:spcPts val="100"/>
               </a:spcAft>
             </a:pPr>
             <a:r>
@@ -10687,7 +10687,7 @@
                 <a:spcPts val="0"/>
               </a:spcBef>
               <a:spcAft>
-                <a:spcPts val="200"/>
+                <a:spcPts val="100"/>
               </a:spcAft>
             </a:pPr>
             <a:r>
@@ -10708,7 +10708,7 @@
                 <a:spcPts val="0"/>
               </a:spcBef>
               <a:spcAft>
-                <a:spcPts val="200"/>
+                <a:spcPts val="100"/>
               </a:spcAft>
             </a:pPr>
             <a:r>
@@ -10729,7 +10729,7 @@
                 <a:spcPts val="0"/>
               </a:spcBef>
               <a:spcAft>
-                <a:spcPts val="200"/>
+                <a:spcPts val="100"/>
               </a:spcAft>
             </a:pPr>
             <a:r>
@@ -10750,7 +10750,7 @@
                 <a:spcPts val="0"/>
               </a:spcBef>
               <a:spcAft>
-                <a:spcPts val="200"/>
+                <a:spcPts val="100"/>
               </a:spcAft>
             </a:pPr>
             <a:r>
@@ -10771,7 +10771,7 @@
                 <a:spcPts val="0"/>
               </a:spcBef>
               <a:spcAft>
-                <a:spcPts val="200"/>
+                <a:spcPts val="100"/>
               </a:spcAft>
             </a:pPr>
             <a:r>
@@ -10783,7 +10783,28 @@
                 <a:ea typeface="Arial"/>
                 <a:cs typeface="Arial"/>
               </a:rPr>
-              <a:t>↓ 再契約 or 条件更新</a:t>
+              <a:t>↓ 再契約・条件更新</a:t>
+            </a:r>
+          </a:p>
+          <a:p>
+            <a:pPr algn="l">
+              <a:spcBef>
+                <a:spcPts val="0"/>
+              </a:spcBef>
+              <a:spcAft>
+                <a:spcPts val="100"/>
+              </a:spcAft>
+            </a:pPr>
+            <a:r>
+              <a:rPr sz="1100" b="0">
+                <a:solidFill>
+                  <a:srgbClr val="D42727"/>
+                </a:solidFill>
+                <a:latin typeface="Arial"/>
+                <a:ea typeface="Arial"/>
+                <a:cs typeface="Arial"/>
+              </a:rPr>
+              <a:t>↓ 申し出なければ自動更新</a:t>
             </a:r>
           </a:p>
         </p:txBody>
@@ -10796,8 +10817,8 @@
         </p:nvSpPr>
         <p:spPr>
           <a:xfrm>
-            <a:off x="5394960" y="3840480"/>
-            <a:ext cx="3200400" cy="777240"/>
+            <a:off x="5394960" y="3995928"/>
+            <a:ext cx="3200400" cy="749808"/>
           </a:xfrm>
           <a:prstGeom prst="rect">
             <a:avLst/>
@@ -10842,7 +10863,7 @@
         </p:nvSpPr>
         <p:spPr>
           <a:xfrm>
-            <a:off x="5532120" y="3950208"/>
+            <a:off x="5532120" y="4105656"/>
             <a:ext cx="2971800" cy="914400"/>
           </a:xfrm>
           <a:prstGeom prst="rect">
